--- a/assets/powerpoints/module-n2-panier/A1-la-circulaire-du-mardi.pptx
+++ b/assets/powerpoints/module-n2-panier/A1-la-circulaire-du-mardi.pptx
@@ -11899,7 +11899,43 @@
                 </a:solidFill>
                 <a:latin typeface="Verdana"/>
               </a:rPr>
-              <a:t>Au Québec, on dit « un &lt;b&gt;spécial&lt;/b&gt; » plutôt qu'« une promotion ». « Le poulet est &lt;b&gt;en spécial&lt;/b&gt; cette semaine. » Le spécial a toujours une date : quand la semaine finit, il finit aussi.</a:t>
+              <a:t>Au Québec, on dit « un </a:t>
+            </a:r>
+            <a:r>
+              <a:rPr sz="2000" b="1" i="0">
+                <a:solidFill>
+                  <a:srgbClr val="4B4F52"/>
+                </a:solidFill>
+                <a:latin typeface="Verdana"/>
+              </a:rPr>
+              <a:t>spécial</a:t>
+            </a:r>
+            <a:r>
+              <a:rPr sz="2000" b="0" i="0">
+                <a:solidFill>
+                  <a:srgbClr val="4B4F52"/>
+                </a:solidFill>
+                <a:latin typeface="Verdana"/>
+              </a:rPr>
+              <a:t> » plutôt qu'« une promotion ». « Le poulet est </a:t>
+            </a:r>
+            <a:r>
+              <a:rPr sz="2000" b="1" i="0">
+                <a:solidFill>
+                  <a:srgbClr val="4B4F52"/>
+                </a:solidFill>
+                <a:latin typeface="Verdana"/>
+              </a:rPr>
+              <a:t>en spécial</a:t>
+            </a:r>
+            <a:r>
+              <a:rPr sz="2000" b="0" i="0">
+                <a:solidFill>
+                  <a:srgbClr val="4B4F52"/>
+                </a:solidFill>
+                <a:latin typeface="Verdana"/>
+              </a:rPr>
+              <a:t> cette semaine. » Le spécial a toujours une date : quand la semaine finit, il finit aussi.</a:t>
             </a:r>
           </a:p>
         </p:txBody>
